--- a/launch/rs/design/detail-handoff/rs-insole-detail-v2.pptx
+++ b/launch/rs/design/detail-handoff/rs-insole-detail-v2.pptx
@@ -127,13 +127,13 @@
   <p:extLst>
     <p:ext uri="{521415D9-36F7-43E2-AB2F-B90AF26B5E84}">
       <p14:sectionLst xmlns:p14="http://schemas.microsoft.com/office/powerpoint/2010/main">
-        <p14:section name="개요" id="{3087aa23-a20d-d389-7c61-eccafc0fe5af}">
+        <p14:section name="개요" id="{828e976c-0351-2c25-50c8-76c72b948ec3}">
           <p14:sldIdLst>
             <p14:sldId id="256"/>
             <p14:sldId id="257"/>
           </p14:sldIdLst>
         </p14:section>
-        <p14:section name="인솔" id="{14f0b468-82a5-da63-42f6-2bec43613b21}">
+        <p14:section name="인솔" id="{9b5b3de3-6012-2b2c-809d-b6c25c880254}">
           <p14:sldIdLst>
             <p14:sldId id="258"/>
             <p14:sldId id="259"/>
@@ -155,7 +155,7 @@
             <p14:sldId id="275"/>
           </p14:sldIdLst>
         </p14:section>
-        <p14:section name="실행" id="{30c03351-e183-f1cd-5426-4a1d71e828f6}">
+        <p14:section name="실행" id="{500cb594-bb8d-3a55-df12-e5f2af34abcb}">
           <p14:sldIdLst>
             <p14:sldId id="276"/>
           </p14:sldIdLst>
@@ -2072,7 +2072,7 @@
           <a:p>
             <a:r>
               <a:rPr lang="en-US" dirty="0"/>
-              <a:t>'발 아픔·통증·평발' 등 의학 단어 금지. 상황 묘사만. '헐거운 신발'은 ICUT 08(반굽·흘러내림)로 이어지는 복선.</a:t>
+              <a:t>공감 축 = '발이 힘든 하루'(신발 아까움 ✗, 대표 지적 10/19). 발 불편은 고객 1인칭 상황 묘사로만 — '통증·평발·족저근막' 등 의학 단어 ✗, 다음 컷에서 '편해집니다/완화' 같은 효능 연결 ✗. 사진은 발·종아리 클로즈업 + 서 있는 현장(얼굴 연출 자유). 다음 CUT 03 제품 등장은 '그래서 신발 속 바닥부터' 톤으로 연결.</a:t>
             </a:r>
             <a:endParaRPr lang="en-US" dirty="0"/>
           </a:p>
@@ -23713,7 +23713,7 @@
                           <a:ea typeface="Malgun Gothic" pitchFamily="34" charset="-122"/>
                           <a:cs typeface="Malgun Gothic" pitchFamily="34" charset="-120"/>
                         </a:rPr>
-                        <a:t>신발은 멀쩡한데, 바닥이 납작해서.</a:t>
+                        <a:t>오후만 되면, 발바닥이 먼저 말해요.</a:t>
                       </a:r>
                       <a:endParaRPr lang="en-US" sz="1200" dirty="0">
                         <a:latin typeface="Malgun Gothic" charset="0"/>
@@ -23781,7 +23781,7 @@
                           <a:ea typeface="Malgun Gothic" pitchFamily="34" charset="-122"/>
                           <a:cs typeface="Malgun Gothic" pitchFamily="34" charset="-120"/>
                         </a:rPr>
-                        <a:t>OK</a:t>
+                        <a:t>ICUT 02 공감 헤드로 활용 (10/19 교체)</a:t>
                       </a:r>
                       <a:endParaRPr lang="en-US" sz="1200" dirty="0">
                         <a:latin typeface="Malgun Gothic" charset="0"/>
@@ -26527,7 +26527,7 @@
                 <a:ea typeface="Malgun Gothic" pitchFamily="34" charset="-122"/>
                 <a:cs typeface="Malgun Gothic" pitchFamily="34" charset="-120"/>
               </a:rPr>
-              <a:t>ICUT 02 / 16   공감 — 신발이 아니라, 바닥이 납작해서</a:t>
+              <a:t>ICUT 02 / 16   공감 — 오후가 되면, 발이 먼저 지친다</a:t>
             </a:r>
             <a:endParaRPr lang="en-US" sz="1600" dirty="0"/>
           </a:p>
@@ -26959,7 +26959,7 @@
                 <a:ea typeface="Malgun Gothic" pitchFamily="34" charset="-122"/>
                 <a:cs typeface="Malgun Gothic" pitchFamily="34" charset="-120"/>
               </a:rPr>
-              <a:t>→ 상황 묘사만, 통증 ✗</a:t>
+              <a:t>→ 발 불편은 '고객 목소리'로만, 제품 효능 연결 ✗</a:t>
             </a:r>
             <a:endParaRPr lang="en-US" sz="1100" dirty="0"/>
           </a:p>
@@ -27062,7 +27062,7 @@
                 <a:ea typeface="Malgun Gothic" pitchFamily="34" charset="-122"/>
                 <a:cs typeface="Malgun Gothic" pitchFamily="34" charset="-120"/>
               </a:rPr>
-              <a:t>신발은 멀쩡한데,</a:t>
+              <a:t>오후만 되면,</a:t>
             </a:r>
             <a:endParaRPr lang="en-US" sz="900" dirty="0"/>
           </a:p>
@@ -27079,7 +27079,7 @@
                 <a:ea typeface="Malgun Gothic" pitchFamily="34" charset="-122"/>
                 <a:cs typeface="Malgun Gothic" pitchFamily="34" charset="-120"/>
               </a:rPr>
-              <a:t>바닥이 납작해서</a:t>
+              <a:t>발바닥이 먼저 말해요</a:t>
             </a:r>
             <a:endParaRPr lang="en-US" sz="900" dirty="0"/>
           </a:p>
@@ -27145,7 +27145,7 @@
                 <a:ea typeface="Malgun Gothic" pitchFamily="34" charset="-122"/>
                 <a:cs typeface="Malgun Gothic" pitchFamily="34" charset="-120"/>
               </a:rPr>
-              <a:t>얇은</a:t>
+              <a:t>주방</a:t>
             </a:r>
             <a:endParaRPr lang="en-US" sz="800" dirty="0"/>
           </a:p>
@@ -27162,7 +27162,24 @@
                 <a:ea typeface="Malgun Gothic" pitchFamily="34" charset="-122"/>
                 <a:cs typeface="Malgun Gothic" pitchFamily="34" charset="-120"/>
               </a:rPr>
-              <a:t>기본 깔창</a:t>
+              <a:t>7시간</a:t>
+            </a:r>
+            <a:endParaRPr lang="en-US" sz="800" dirty="0"/>
+          </a:p>
+          <a:p>
+            <a:pPr algn="ctr" indent="0" marL="0">
+              <a:buNone/>
+            </a:pPr>
+            <a:r>
+              <a:rPr lang="en-US" sz="800" dirty="0">
+                <a:solidFill>
+                  <a:srgbClr val="232323"/>
+                </a:solidFill>
+                <a:latin typeface="Malgun Gothic" pitchFamily="34" charset="0"/>
+                <a:ea typeface="Malgun Gothic" pitchFamily="34" charset="-122"/>
+                <a:cs typeface="Malgun Gothic" pitchFamily="34" charset="-120"/>
+              </a:rPr>
+              <a:t>서서</a:t>
             </a:r>
             <a:endParaRPr lang="en-US" sz="800" dirty="0"/>
           </a:p>
@@ -27228,7 +27245,7 @@
                 <a:ea typeface="Malgun Gothic" pitchFamily="34" charset="-122"/>
                 <a:cs typeface="Malgun Gothic" pitchFamily="34" charset="-120"/>
               </a:rPr>
-              <a:t>헐거워진</a:t>
+              <a:t>매장</a:t>
             </a:r>
             <a:endParaRPr lang="en-US" sz="800" dirty="0"/>
           </a:p>
@@ -27245,7 +27262,24 @@
                 <a:ea typeface="Malgun Gothic" pitchFamily="34" charset="-122"/>
                 <a:cs typeface="Malgun Gothic" pitchFamily="34" charset="-120"/>
               </a:rPr>
-              <a:t>슬립온</a:t>
+              <a:t>계산대</a:t>
+            </a:r>
+            <a:endParaRPr lang="en-US" sz="800" dirty="0"/>
+          </a:p>
+          <a:p>
+            <a:pPr algn="ctr" indent="0" marL="0">
+              <a:buNone/>
+            </a:pPr>
+            <a:r>
+              <a:rPr lang="en-US" sz="800" dirty="0">
+                <a:solidFill>
+                  <a:srgbClr val="232323"/>
+                </a:solidFill>
+                <a:latin typeface="Malgun Gothic" pitchFamily="34" charset="0"/>
+                <a:ea typeface="Malgun Gothic" pitchFamily="34" charset="-122"/>
+                <a:cs typeface="Malgun Gothic" pitchFamily="34" charset="-120"/>
+              </a:rPr>
+              <a:t>앞</a:t>
             </a:r>
             <a:endParaRPr lang="en-US" sz="800" dirty="0"/>
           </a:p>
@@ -27311,7 +27345,7 @@
                 <a:ea typeface="Malgun Gothic" pitchFamily="34" charset="-122"/>
                 <a:cs typeface="Malgun Gothic" pitchFamily="34" charset="-120"/>
               </a:rPr>
-              <a:t>주말</a:t>
+              <a:t>퇴근길</a:t>
             </a:r>
             <a:endParaRPr lang="en-US" sz="800" dirty="0"/>
           </a:p>
@@ -27328,7 +27362,24 @@
                 <a:ea typeface="Malgun Gothic" pitchFamily="34" charset="-122"/>
                 <a:cs typeface="Malgun Gothic" pitchFamily="34" charset="-120"/>
               </a:rPr>
-              <a:t>운동화</a:t>
+              <a:t>지하철</a:t>
+            </a:r>
+            <a:endParaRPr lang="en-US" sz="800" dirty="0"/>
+          </a:p>
+          <a:p>
+            <a:pPr algn="ctr" indent="0" marL="0">
+              <a:buNone/>
+            </a:pPr>
+            <a:r>
+              <a:rPr lang="en-US" sz="800" dirty="0">
+                <a:solidFill>
+                  <a:srgbClr val="232323"/>
+                </a:solidFill>
+                <a:latin typeface="Malgun Gothic" pitchFamily="34" charset="0"/>
+                <a:ea typeface="Malgun Gothic" pitchFamily="34" charset="-122"/>
+                <a:cs typeface="Malgun Gothic" pitchFamily="34" charset="-120"/>
+              </a:rPr>
+              <a:t>계단</a:t>
             </a:r>
             <a:endParaRPr lang="en-US" sz="800" dirty="0"/>
           </a:p>
@@ -27367,7 +27418,7 @@
                 <a:ea typeface="Malgun Gothic" pitchFamily="34" charset="-122"/>
                 <a:cs typeface="Malgun Gothic" pitchFamily="34" charset="-120"/>
               </a:rPr>
-              <a:t>그래서, 바닥만 새로.</a:t>
+              <a:t>발이 먼저 퇴근하고 싶은 날.</a:t>
             </a:r>
             <a:endParaRPr lang="en-US" sz="900" dirty="0"/>
           </a:p>
@@ -27406,7 +27457,7 @@
                 <a:ea typeface="Malgun Gothic" pitchFamily="34" charset="-122"/>
                 <a:cs typeface="Malgun Gothic" pitchFamily="34" charset="-120"/>
               </a:rPr>
-              <a:t>3분할 · 신발 속 납작한 기본 깔창</a:t>
+              <a:t>3분할 · 오래 서 있는 하루의 3장면</a:t>
             </a:r>
             <a:endParaRPr lang="en-US" sz="1000" dirty="0"/>
           </a:p>
@@ -27448,7 +27499,7 @@
                 <a:ea typeface="Malgun Gothic" pitchFamily="34" charset="-122"/>
                 <a:cs typeface="Malgun Gothic" pitchFamily="34" charset="-120"/>
               </a:rPr>
-              <a:t>신발은 멀쩡한데,</a:t>
+              <a:t>오후만 되면,</a:t>
             </a:r>
             <a:endParaRPr lang="en-US" sz="1600" dirty="0"/>
           </a:p>
@@ -27468,7 +27519,7 @@
                 <a:ea typeface="Malgun Gothic" pitchFamily="34" charset="-122"/>
                 <a:cs typeface="Malgun Gothic" pitchFamily="34" charset="-120"/>
               </a:rPr>
-              <a:t>바닥이 납작해서</a:t>
+              <a:t>발바닥이 먼저 말해요</a:t>
             </a:r>
             <a:endParaRPr lang="en-US" sz="1600" dirty="0"/>
           </a:p>
@@ -27508,7 +27559,7 @@
                 <a:ea typeface="Malgun Gothic" pitchFamily="34" charset="-122"/>
                 <a:cs typeface="Malgun Gothic" pitchFamily="34" charset="-120"/>
               </a:rPr>
-              <a:t>얇은 기본 깔창,</a:t>
+              <a:t>7시간 서 있는 주방,</a:t>
             </a:r>
             <a:endParaRPr lang="en-US" sz="1600" dirty="0"/>
           </a:p>
@@ -27528,7 +27579,7 @@
                 <a:ea typeface="Malgun Gothic" pitchFamily="34" charset="-122"/>
                 <a:cs typeface="Malgun Gothic" pitchFamily="34" charset="-120"/>
               </a:rPr>
-              <a:t>신을 때마다 헐거운 신발,</a:t>
+              <a:t>하루 종일 계산대 앞,</a:t>
             </a:r>
             <a:endParaRPr lang="en-US" sz="1600" dirty="0"/>
           </a:p>
@@ -27548,7 +27599,7 @@
                 <a:ea typeface="Malgun Gothic" pitchFamily="34" charset="-122"/>
                 <a:cs typeface="Malgun Gothic" pitchFamily="34" charset="-120"/>
               </a:rPr>
-              <a:t>새로 사기엔 아까운 운동화.</a:t>
+              <a:t>퇴근길 지하철 계단.</a:t>
             </a:r>
             <a:endParaRPr lang="en-US" sz="1600" dirty="0"/>
           </a:p>
@@ -27577,7 +27628,27 @@
                 <a:ea typeface="Malgun Gothic" pitchFamily="34" charset="-122"/>
                 <a:cs typeface="Malgun Gothic" pitchFamily="34" charset="-120"/>
               </a:rPr>
-              <a:t>그래서, 바닥만 새로.</a:t>
+              <a:t>발바닥이 화끈, 뻐근.</a:t>
+            </a:r>
+            <a:endParaRPr lang="en-US" sz="1600" dirty="0"/>
+          </a:p>
+          <a:p>
+            <a:pPr algn="ctr" indent="0" marL="0">
+              <a:lnSpc>
+                <a:spcPct val="125000"/>
+              </a:lnSpc>
+              <a:buNone/>
+            </a:pPr>
+            <a:r>
+              <a:rPr lang="en-US" sz="1400" dirty="0">
+                <a:solidFill>
+                  <a:srgbClr val="232323"/>
+                </a:solidFill>
+                <a:latin typeface="Malgun Gothic" pitchFamily="34" charset="0"/>
+                <a:ea typeface="Malgun Gothic" pitchFamily="34" charset="-122"/>
+                <a:cs typeface="Malgun Gothic" pitchFamily="34" charset="-120"/>
+              </a:rPr>
+              <a:t>오늘도 발이 먼저 퇴근하고 싶은 날.</a:t>
             </a:r>
             <a:endParaRPr lang="en-US" sz="1600" dirty="0"/>
           </a:p>

--- a/launch/rs/design/detail-handoff/rs-insole-detail-v2.pptx
+++ b/launch/rs/design/detail-handoff/rs-insole-detail-v2.pptx
@@ -127,13 +127,13 @@
   <p:extLst>
     <p:ext uri="{521415D9-36F7-43E2-AB2F-B90AF26B5E84}">
       <p14:sectionLst xmlns:p14="http://schemas.microsoft.com/office/powerpoint/2010/main">
-        <p14:section name="개요" id="{828e976c-0351-2c25-50c8-76c72b948ec3}">
+        <p14:section name="개요" id="{4b99561d-0a3d-4af3-2f8e-e6b6ac84ec9a}">
           <p14:sldIdLst>
             <p14:sldId id="256"/>
             <p14:sldId id="257"/>
           </p14:sldIdLst>
         </p14:section>
-        <p14:section name="인솔" id="{9b5b3de3-6012-2b2c-809d-b6c25c880254}">
+        <p14:section name="인솔" id="{e85b03bb-a905-e749-7566-48d1fd4d42b0}">
           <p14:sldIdLst>
             <p14:sldId id="258"/>
             <p14:sldId id="259"/>
@@ -155,7 +155,7 @@
             <p14:sldId id="275"/>
           </p14:sldIdLst>
         </p14:section>
-        <p14:section name="실행" id="{500cb594-bb8d-3a55-df12-e5f2af34abcb}">
+        <p14:section name="실행" id="{06cb7f21-f17f-4ec7-ff84-4dc43dab91ec}">
           <p14:sldIdLst>
             <p14:sldId id="276"/>
           </p14:sldIdLst>
@@ -27785,7 +27785,7 @@
                 <a:ea typeface="Malgun Gothic" pitchFamily="34" charset="-122"/>
                 <a:cs typeface="Malgun Gothic" pitchFamily="34" charset="-120"/>
               </a:rPr>
-              <a:t>ICUT 03 / 16   제품 등장 — 5가지 구조</a:t>
+              <a:t>ICUT 03 / 16   제품 등장 — 쿼드그립의 구조</a:t>
             </a:r>
             <a:endParaRPr lang="en-US" sz="1600" dirty="0"/>
           </a:p>
@@ -28160,7 +28160,7 @@
                 <a:ea typeface="Malgun Gothic" pitchFamily="34" charset="-122"/>
                 <a:cs typeface="Malgun Gothic" pitchFamily="34" charset="-120"/>
               </a:rPr>
-              <a:t>행택 §4</a:t>
+              <a:t>타사 레퍼런스는 없음</a:t>
             </a:r>
             <a:pPr indent="0" marL="0">
               <a:spcAft>
@@ -28177,7 +28177,7 @@
                 <a:ea typeface="Malgun Gothic" pitchFamily="34" charset="-122"/>
                 <a:cs typeface="Malgun Gothic" pitchFamily="34" charset="-120"/>
               </a:rPr>
-              <a:t>  아이콘</a:t>
+              <a:t>  </a:t>
             </a:r>
             <a:endParaRPr lang="en-US" sz="1100" dirty="0"/>
           </a:p>
@@ -28188,83 +28188,13 @@
               </a:spcAft>
               <a:buNone/>
             </a:pPr>
-            <a:r>
-              <a:rPr lang="en-US" sz="1000" dirty="0">
-                <a:solidFill>
-                  <a:srgbClr val="232323"/>
-                </a:solidFill>
-                <a:latin typeface="Malgun Gothic" pitchFamily="34" charset="0"/>
-                <a:ea typeface="Malgun Gothic" pitchFamily="34" charset="-122"/>
-                <a:cs typeface="Malgun Gothic" pitchFamily="34" charset="-120"/>
-              </a:rPr>
-              <a:t>아치 · 4점 · 뒤꿈치 컵 · 통기 도트</a:t>
-            </a:r>
             <a:endParaRPr lang="en-US" sz="1100" dirty="0"/>
           </a:p>
-          <a:p>
-            <a:pPr indent="0" marL="0">
-              <a:spcAft>
-                <a:spcPts val="200"/>
-              </a:spcAft>
-              <a:buNone/>
-            </a:pPr>
-            <a:r>
-              <a:rPr lang="en-US" sz="1000" b="1" dirty="0">
-                <a:solidFill>
-                  <a:srgbClr val="3D4A12"/>
-                </a:solidFill>
-                <a:latin typeface="Malgun Gothic" pitchFamily="34" charset="0"/>
-                <a:ea typeface="Malgun Gothic" pitchFamily="34" charset="-122"/>
-                <a:cs typeface="Malgun Gothic" pitchFamily="34" charset="-120"/>
-              </a:rPr>
-              <a:t>→ + 반굽 길이 추가</a:t>
-            </a:r>
-            <a:endParaRPr lang="en-US" sz="1100" dirty="0"/>
-          </a:p>
         </p:txBody>
       </p:sp>
       <p:sp>
         <p:nvSpPr>
-          <p:cNvPr id="17" name="Text 15"/>
-          <p:cNvSpPr txBox="1"/>
-          <p:nvPr/>
-        </p:nvSpPr>
-        <p:spPr>
-          <a:xfrm>
-            <a:off x="603504" y="5687568"/>
-            <a:ext cx="3291840" cy="457200"/>
-          </a:xfrm>
-          <a:prstGeom prst="rect">
-            <a:avLst/>
-          </a:prstGeom>
-          <a:noFill/>
-          <a:ln/>
-        </p:spPr>
-        <p:txBody>
-          <a:bodyPr wrap="square" lIns="0" tIns="0" rIns="0" bIns="0" rtlCol="0" anchor="t"/>
-          <a:lstStyle/>
-          <a:p>
-            <a:pPr algn="ctr" indent="0" marL="0">
-              <a:buNone/>
-            </a:pPr>
-            <a:r>
-              <a:rPr lang="en-US" sz="1000" dirty="0">
-                <a:solidFill>
-                  <a:srgbClr val="8A8A8A"/>
-                </a:solidFill>
-                <a:latin typeface="Malgun Gothic" pitchFamily="34" charset="0"/>
-                <a:ea typeface="Malgun Gothic" pitchFamily="34" charset="-122"/>
-                <a:cs typeface="Malgun Gothic" pitchFamily="34" charset="-120"/>
-              </a:rPr>
-              <a:t>REF · 행택 앞표지 아이콘 + 반굽</a:t>
-            </a:r>
-            <a:endParaRPr lang="en-US" sz="1000" dirty="0"/>
-          </a:p>
-        </p:txBody>
-      </p:sp>
-      <p:sp>
-        <p:nvSpPr>
-          <p:cNvPr id="18" name="Shape 16"/>
+          <p:cNvPr id="17" name="Shape 15"/>
           <p:cNvSpPr/>
           <p:nvPr/>
         </p:nvSpPr>
@@ -28289,7 +28219,7 @@
       </p:sp>
       <p:sp>
         <p:nvSpPr>
-          <p:cNvPr id="19" name="Text 17"/>
+          <p:cNvPr id="18" name="Text 16"/>
           <p:cNvSpPr txBox="1"/>
           <p:nvPr/>
         </p:nvSpPr>
@@ -28328,7 +28258,7 @@
       </p:sp>
       <p:sp>
         <p:nvSpPr>
-          <p:cNvPr id="20" name="Shape 18"/>
+          <p:cNvPr id="19" name="Shape 17"/>
           <p:cNvSpPr/>
           <p:nvPr/>
         </p:nvSpPr>
@@ -28355,7 +28285,7 @@
       </p:sp>
       <p:sp>
         <p:nvSpPr>
-          <p:cNvPr id="21" name="Text 19"/>
+          <p:cNvPr id="20" name="Text 18"/>
           <p:cNvSpPr txBox="1"/>
           <p:nvPr/>
         </p:nvSpPr>
@@ -28411,14 +28341,14 @@
       </p:sp>
       <p:sp>
         <p:nvSpPr>
-          <p:cNvPr id="22" name="Shape 20"/>
+          <p:cNvPr id="21" name="Shape 19"/>
           <p:cNvSpPr/>
           <p:nvPr/>
         </p:nvSpPr>
         <p:spPr>
           <a:xfrm>
-            <a:off x="4636008" y="2514600"/>
-            <a:ext cx="548640" cy="548640"/>
+            <a:off x="5504688" y="2697480"/>
+            <a:ext cx="566928" cy="566928"/>
           </a:xfrm>
           <a:prstGeom prst="ellipse">
             <a:avLst/>
@@ -28436,14 +28366,14 @@
       </p:sp>
       <p:sp>
         <p:nvSpPr>
-          <p:cNvPr id="23" name="Text 21"/>
+          <p:cNvPr id="22" name="Text 20"/>
           <p:cNvSpPr txBox="1"/>
           <p:nvPr/>
         </p:nvSpPr>
         <p:spPr>
           <a:xfrm>
-            <a:off x="4636008" y="2514600"/>
-            <a:ext cx="548640" cy="548640"/>
+            <a:off x="5504688" y="2697480"/>
+            <a:ext cx="566928" cy="566928"/>
           </a:xfrm>
           <a:prstGeom prst="rect">
             <a:avLst/>
@@ -28459,7 +28389,7 @@
               <a:buNone/>
             </a:pPr>
             <a:r>
-              <a:rPr lang="en-US" sz="700" b="1" dirty="0">
+              <a:rPr lang="en-US" sz="600" b="1" dirty="0">
                 <a:solidFill>
                   <a:srgbClr val="232323"/>
                 </a:solidFill>
@@ -28467,16 +28397,16 @@
                 <a:ea typeface="Malgun Gothic" pitchFamily="34" charset="-122"/>
                 <a:cs typeface="Malgun Gothic" pitchFamily="34" charset="-120"/>
               </a:rPr>
-              <a:t>아치</a:t>
-            </a:r>
-            <a:endParaRPr lang="en-US" sz="700" dirty="0"/>
-          </a:p>
-          <a:p>
-            <a:pPr algn="ctr" indent="0" marL="0">
-              <a:buNone/>
-            </a:pPr>
-            <a:r>
-              <a:rPr lang="en-US" sz="700" b="1" dirty="0">
+              <a:t>논슬립패턴</a:t>
+            </a:r>
+            <a:endParaRPr lang="en-US" sz="600" dirty="0"/>
+          </a:p>
+          <a:p>
+            <a:pPr algn="ctr" indent="0" marL="0">
+              <a:buNone/>
+            </a:pPr>
+            <a:r>
+              <a:rPr lang="en-US" sz="600" b="1" dirty="0">
                 <a:solidFill>
                   <a:srgbClr val="232323"/>
                 </a:solidFill>
@@ -28484,22 +28414,22 @@
                 <a:ea typeface="Malgun Gothic" pitchFamily="34" charset="-122"/>
                 <a:cs typeface="Malgun Gothic" pitchFamily="34" charset="-120"/>
               </a:rPr>
-              <a:t>가득</a:t>
-            </a:r>
-            <a:endParaRPr lang="en-US" sz="700" dirty="0"/>
+              <a:t>윗면/아랫면</a:t>
+            </a:r>
+            <a:endParaRPr lang="en-US" sz="600" dirty="0"/>
           </a:p>
         </p:txBody>
       </p:sp>
       <p:sp>
         <p:nvSpPr>
-          <p:cNvPr id="24" name="Shape 22"/>
+          <p:cNvPr id="23" name="Shape 21"/>
           <p:cNvSpPr/>
           <p:nvPr/>
         </p:nvSpPr>
         <p:spPr>
           <a:xfrm>
-            <a:off x="6464808" y="2514600"/>
-            <a:ext cx="548640" cy="548640"/>
+            <a:off x="6099048" y="3200400"/>
+            <a:ext cx="566928" cy="566928"/>
           </a:xfrm>
           <a:prstGeom prst="ellipse">
             <a:avLst/>
@@ -28517,14 +28447,14 @@
       </p:sp>
       <p:sp>
         <p:nvSpPr>
-          <p:cNvPr id="25" name="Text 23"/>
+          <p:cNvPr id="24" name="Text 22"/>
           <p:cNvSpPr txBox="1"/>
           <p:nvPr/>
         </p:nvSpPr>
         <p:spPr>
           <a:xfrm>
-            <a:off x="6464808" y="2514600"/>
-            <a:ext cx="548640" cy="548640"/>
+            <a:off x="6099048" y="3200400"/>
+            <a:ext cx="566928" cy="566928"/>
           </a:xfrm>
           <a:prstGeom prst="rect">
             <a:avLst/>
@@ -28548,22 +28478,39 @@
                 <a:ea typeface="Malgun Gothic" pitchFamily="34" charset="-122"/>
                 <a:cs typeface="Malgun Gothic" pitchFamily="34" charset="-120"/>
               </a:rPr>
-              <a:t>반굽</a:t>
+              <a:t>아치</a:t>
             </a:r>
             <a:endParaRPr lang="en-US" sz="700" dirty="0"/>
           </a:p>
+          <a:p>
+            <a:pPr algn="ctr" indent="0" marL="0">
+              <a:buNone/>
+            </a:pPr>
+            <a:r>
+              <a:rPr lang="en-US" sz="700" b="1" dirty="0">
+                <a:solidFill>
+                  <a:srgbClr val="232323"/>
+                </a:solidFill>
+                <a:latin typeface="Malgun Gothic" pitchFamily="34" charset="0"/>
+                <a:ea typeface="Malgun Gothic" pitchFamily="34" charset="-122"/>
+                <a:cs typeface="Malgun Gothic" pitchFamily="34" charset="-120"/>
+              </a:rPr>
+              <a:t>서포터</a:t>
+            </a:r>
+            <a:endParaRPr lang="en-US" sz="700" dirty="0"/>
+          </a:p>
         </p:txBody>
       </p:sp>
       <p:sp>
         <p:nvSpPr>
-          <p:cNvPr id="26" name="Shape 24"/>
+          <p:cNvPr id="25" name="Shape 23"/>
           <p:cNvSpPr/>
           <p:nvPr/>
         </p:nvSpPr>
         <p:spPr>
           <a:xfrm>
-            <a:off x="4636008" y="3337560"/>
-            <a:ext cx="548640" cy="548640"/>
+            <a:off x="5532120" y="3977640"/>
+            <a:ext cx="566928" cy="566928"/>
           </a:xfrm>
           <a:prstGeom prst="ellipse">
             <a:avLst/>
@@ -28581,14 +28528,14 @@
       </p:sp>
       <p:sp>
         <p:nvSpPr>
-          <p:cNvPr id="27" name="Text 25"/>
+          <p:cNvPr id="26" name="Text 24"/>
           <p:cNvSpPr txBox="1"/>
           <p:nvPr/>
         </p:nvSpPr>
         <p:spPr>
           <a:xfrm>
-            <a:off x="4636008" y="3337560"/>
-            <a:ext cx="548640" cy="548640"/>
+            <a:off x="5532120" y="3977640"/>
+            <a:ext cx="566928" cy="566928"/>
           </a:xfrm>
           <a:prstGeom prst="rect">
             <a:avLst/>
@@ -28612,7 +28559,7 @@
                 <a:ea typeface="Malgun Gothic" pitchFamily="34" charset="-122"/>
                 <a:cs typeface="Malgun Gothic" pitchFamily="34" charset="-120"/>
               </a:rPr>
-              <a:t>뒤꿈치</a:t>
+              <a:t>통기</a:t>
             </a:r>
             <a:endParaRPr lang="en-US" sz="700" dirty="0"/>
           </a:p>
@@ -28629,7 +28576,7 @@
                 <a:ea typeface="Malgun Gothic" pitchFamily="34" charset="-122"/>
                 <a:cs typeface="Malgun Gothic" pitchFamily="34" charset="-120"/>
               </a:rPr>
-              <a:t>컵</a:t>
+              <a:t>구멍</a:t>
             </a:r>
             <a:endParaRPr lang="en-US" sz="700" dirty="0"/>
           </a:p>
@@ -28637,14 +28584,14 @@
       </p:sp>
       <p:sp>
         <p:nvSpPr>
-          <p:cNvPr id="28" name="Shape 26"/>
+          <p:cNvPr id="27" name="Shape 25"/>
           <p:cNvSpPr/>
           <p:nvPr/>
         </p:nvSpPr>
         <p:spPr>
           <a:xfrm>
-            <a:off x="6464808" y="3337560"/>
-            <a:ext cx="548640" cy="548640"/>
+            <a:off x="5001768" y="4160520"/>
+            <a:ext cx="566928" cy="566928"/>
           </a:xfrm>
           <a:prstGeom prst="ellipse">
             <a:avLst/>
@@ -28662,14 +28609,14 @@
       </p:sp>
       <p:sp>
         <p:nvSpPr>
-          <p:cNvPr id="29" name="Text 27"/>
+          <p:cNvPr id="28" name="Text 26"/>
           <p:cNvSpPr txBox="1"/>
           <p:nvPr/>
         </p:nvSpPr>
         <p:spPr>
           <a:xfrm>
-            <a:off x="6464808" y="3337560"/>
-            <a:ext cx="548640" cy="548640"/>
+            <a:off x="5001768" y="4160520"/>
+            <a:ext cx="566928" cy="566928"/>
           </a:xfrm>
           <a:prstGeom prst="rect">
             <a:avLst/>
@@ -28693,47 +28640,78 @@
                 <a:ea typeface="Malgun Gothic" pitchFamily="34" charset="-122"/>
                 <a:cs typeface="Malgun Gothic" pitchFamily="34" charset="-120"/>
               </a:rPr>
-              <a:t>4점</a:t>
+              <a:t>뒤꿈치</a:t>
             </a:r>
             <a:endParaRPr lang="en-US" sz="700" dirty="0"/>
           </a:p>
+          <a:p>
+            <a:pPr algn="ctr" indent="0" marL="0">
+              <a:buNone/>
+            </a:pPr>
+            <a:r>
+              <a:rPr lang="en-US" sz="700" b="1" dirty="0">
+                <a:solidFill>
+                  <a:srgbClr val="232323"/>
+                </a:solidFill>
+                <a:latin typeface="Malgun Gothic" pitchFamily="34" charset="0"/>
+                <a:ea typeface="Malgun Gothic" pitchFamily="34" charset="-122"/>
+                <a:cs typeface="Malgun Gothic" pitchFamily="34" charset="-120"/>
+              </a:rPr>
+              <a:t>컵</a:t>
+            </a:r>
+            <a:endParaRPr lang="en-US" sz="700" dirty="0"/>
+          </a:p>
         </p:txBody>
       </p:sp>
       <p:sp>
         <p:nvSpPr>
-          <p:cNvPr id="30" name="Shape 28"/>
-          <p:cNvSpPr/>
-          <p:nvPr/>
-        </p:nvSpPr>
-        <p:spPr>
-          <a:xfrm>
-            <a:off x="5550408" y="4480560"/>
-            <a:ext cx="548640" cy="548640"/>
-          </a:xfrm>
-          <a:prstGeom prst="ellipse">
-            <a:avLst/>
-          </a:prstGeom>
-          <a:solidFill>
-            <a:srgbClr val="C6F432"/>
-          </a:solidFill>
-          <a:ln w="12700">
-            <a:solidFill>
-              <a:srgbClr val="C6F432"/>
-            </a:solidFill>
-            <a:prstDash val="solid"/>
-          </a:ln>
-        </p:spPr>
-      </p:sp>
-      <p:sp>
-        <p:nvSpPr>
-          <p:cNvPr id="31" name="Text 29"/>
+          <p:cNvPr id="29" name="Text 27"/>
           <p:cNvSpPr txBox="1"/>
           <p:nvPr/>
         </p:nvSpPr>
         <p:spPr>
           <a:xfrm>
-            <a:off x="5550408" y="4480560"/>
-            <a:ext cx="548640" cy="548640"/>
+            <a:off x="4178808" y="5687568"/>
+            <a:ext cx="3291840" cy="457200"/>
+          </a:xfrm>
+          <a:prstGeom prst="rect">
+            <a:avLst/>
+          </a:prstGeom>
+          <a:noFill/>
+          <a:ln/>
+        </p:spPr>
+        <p:txBody>
+          <a:bodyPr wrap="square" lIns="0" tIns="0" rIns="0" bIns="0" rtlCol="0" anchor="t"/>
+          <a:lstStyle/>
+          <a:p>
+            <a:pPr algn="ctr" indent="0" marL="0">
+              <a:buNone/>
+            </a:pPr>
+            <a:r>
+              <a:rPr lang="en-US" sz="1000" dirty="0">
+                <a:solidFill>
+                  <a:srgbClr val="8A8A8A"/>
+                </a:solidFill>
+                <a:latin typeface="Malgun Gothic" pitchFamily="34" charset="0"/>
+                <a:ea typeface="Malgun Gothic" pitchFamily="34" charset="-122"/>
+                <a:cs typeface="Malgun Gothic" pitchFamily="34" charset="-120"/>
+              </a:rPr>
+              <a:t>반굽 인솔 탑뷰 + 아이콘 4</a:t>
+            </a:r>
+            <a:endParaRPr lang="en-US" sz="1000" dirty="0"/>
+          </a:p>
+        </p:txBody>
+      </p:sp>
+      <p:sp>
+        <p:nvSpPr>
+          <p:cNvPr id="30" name="Text 28"/>
+          <p:cNvSpPr txBox="1"/>
+          <p:nvPr/>
+        </p:nvSpPr>
+        <p:spPr>
+          <a:xfrm>
+            <a:off x="7845552" y="2011680"/>
+            <a:ext cx="3108960" cy="3291840"/>
           </a:xfrm>
           <a:prstGeom prst="rect">
             <a:avLst/>
@@ -28746,101 +28724,6 @@
           <a:lstStyle/>
           <a:p>
             <a:pPr algn="ctr" indent="0" marL="0">
-              <a:buNone/>
-            </a:pPr>
-            <a:r>
-              <a:rPr lang="en-US" sz="700" b="1" dirty="0">
-                <a:solidFill>
-                  <a:srgbClr val="232323"/>
-                </a:solidFill>
-                <a:latin typeface="Malgun Gothic" pitchFamily="34" charset="0"/>
-                <a:ea typeface="Malgun Gothic" pitchFamily="34" charset="-122"/>
-                <a:cs typeface="Malgun Gothic" pitchFamily="34" charset="-120"/>
-              </a:rPr>
-              <a:t>통기</a:t>
-            </a:r>
-            <a:endParaRPr lang="en-US" sz="700" dirty="0"/>
-          </a:p>
-          <a:p>
-            <a:pPr algn="ctr" indent="0" marL="0">
-              <a:buNone/>
-            </a:pPr>
-            <a:r>
-              <a:rPr lang="en-US" sz="700" b="1" dirty="0">
-                <a:solidFill>
-                  <a:srgbClr val="232323"/>
-                </a:solidFill>
-                <a:latin typeface="Malgun Gothic" pitchFamily="34" charset="0"/>
-                <a:ea typeface="Malgun Gothic" pitchFamily="34" charset="-122"/>
-                <a:cs typeface="Malgun Gothic" pitchFamily="34" charset="-120"/>
-              </a:rPr>
-              <a:t>도트</a:t>
-            </a:r>
-            <a:endParaRPr lang="en-US" sz="700" dirty="0"/>
-          </a:p>
-        </p:txBody>
-      </p:sp>
-      <p:sp>
-        <p:nvSpPr>
-          <p:cNvPr id="32" name="Text 30"/>
-          <p:cNvSpPr txBox="1"/>
-          <p:nvPr/>
-        </p:nvSpPr>
-        <p:spPr>
-          <a:xfrm>
-            <a:off x="4178808" y="5687568"/>
-            <a:ext cx="3291840" cy="457200"/>
-          </a:xfrm>
-          <a:prstGeom prst="rect">
-            <a:avLst/>
-          </a:prstGeom>
-          <a:noFill/>
-          <a:ln/>
-        </p:spPr>
-        <p:txBody>
-          <a:bodyPr wrap="square" lIns="0" tIns="0" rIns="0" bIns="0" rtlCol="0" anchor="t"/>
-          <a:lstStyle/>
-          <a:p>
-            <a:pPr algn="ctr" indent="0" marL="0">
-              <a:buNone/>
-            </a:pPr>
-            <a:r>
-              <a:rPr lang="en-US" sz="1000" dirty="0">
-                <a:solidFill>
-                  <a:srgbClr val="8A8A8A"/>
-                </a:solidFill>
-                <a:latin typeface="Malgun Gothic" pitchFamily="34" charset="0"/>
-                <a:ea typeface="Malgun Gothic" pitchFamily="34" charset="-122"/>
-                <a:cs typeface="Malgun Gothic" pitchFamily="34" charset="-120"/>
-              </a:rPr>
-              <a:t>반굽 인솔 탑뷰 + 아이콘 5</a:t>
-            </a:r>
-            <a:endParaRPr lang="en-US" sz="1000" dirty="0"/>
-          </a:p>
-        </p:txBody>
-      </p:sp>
-      <p:sp>
-        <p:nvSpPr>
-          <p:cNvPr id="33" name="Text 31"/>
-          <p:cNvSpPr txBox="1"/>
-          <p:nvPr/>
-        </p:nvSpPr>
-        <p:spPr>
-          <a:xfrm>
-            <a:off x="7845552" y="2011680"/>
-            <a:ext cx="3108960" cy="3291840"/>
-          </a:xfrm>
-          <a:prstGeom prst="rect">
-            <a:avLst/>
-          </a:prstGeom>
-          <a:noFill/>
-          <a:ln/>
-        </p:spPr>
-        <p:txBody>
-          <a:bodyPr wrap="square" lIns="0" tIns="0" rIns="0" bIns="0" rtlCol="0" anchor="ctr"/>
-          <a:lstStyle/>
-          <a:p>
-            <a:pPr algn="ctr" indent="0" marL="0">
               <a:lnSpc>
                 <a:spcPct val="125000"/>
               </a:lnSpc>
@@ -28855,7 +28738,7 @@
                 <a:ea typeface="Malgun Gothic" pitchFamily="34" charset="-122"/>
                 <a:cs typeface="Malgun Gothic" pitchFamily="34" charset="-120"/>
               </a:rPr>
-              <a:t>다섯 가지를</a:t>
+              <a:t>네 가지(quadgrip)</a:t>
             </a:r>
             <a:endParaRPr lang="en-US" sz="1600" dirty="0"/>
           </a:p>
@@ -28875,7 +28758,7 @@
                 <a:ea typeface="Malgun Gothic" pitchFamily="34" charset="-122"/>
                 <a:cs typeface="Malgun Gothic" pitchFamily="34" charset="-120"/>
               </a:rPr>
-              <a:t>한 장에 담았습니다</a:t>
+              <a:t>포인트를 잡았습니다</a:t>
             </a:r>
             <a:endParaRPr lang="en-US" sz="1600" dirty="0"/>
           </a:p>
@@ -28915,7 +28798,7 @@
                 <a:ea typeface="Malgun Gothic" pitchFamily="34" charset="-122"/>
                 <a:cs typeface="Malgun Gothic" pitchFamily="34" charset="-120"/>
               </a:rPr>
-              <a:t>아치 라인을 따라 가득</a:t>
+              <a:t>1. 아치 라인을 따라 쿠션 가득</a:t>
             </a:r>
             <a:endParaRPr lang="en-US" sz="1600" dirty="0"/>
           </a:p>
@@ -28935,7 +28818,7 @@
                 <a:ea typeface="Malgun Gothic" pitchFamily="34" charset="-122"/>
                 <a:cs typeface="Malgun Gothic" pitchFamily="34" charset="-120"/>
               </a:rPr>
-              <a:t>반굽 길이 — 쓰던 깔창 밑에도</a:t>
+              <a:t>2. 뒤꿈치 링 컵</a:t>
             </a:r>
             <a:endParaRPr lang="en-US" sz="1600" dirty="0"/>
           </a:p>
@@ -28955,7 +28838,7 @@
                 <a:ea typeface="Malgun Gothic" pitchFamily="34" charset="-122"/>
                 <a:cs typeface="Malgun Gothic" pitchFamily="34" charset="-120"/>
               </a:rPr>
-              <a:t>뒤꿈치 링 컵</a:t>
+              <a:t>3. 논슬립 패턴 윗면/아랫면 적용</a:t>
             </a:r>
             <a:endParaRPr lang="en-US" sz="1600" dirty="0"/>
           </a:p>
@@ -28975,35 +28858,15 @@
                 <a:ea typeface="Malgun Gothic" pitchFamily="34" charset="-122"/>
                 <a:cs typeface="Malgun Gothic" pitchFamily="34" charset="-120"/>
               </a:rPr>
-              <a:t>쿼드그립 4점</a:t>
+              <a:t>4. 통기 구멍</a:t>
             </a:r>
             <a:endParaRPr lang="en-US" sz="1600" dirty="0"/>
           </a:p>
-          <a:p>
-            <a:pPr algn="ctr" indent="0" marL="0">
-              <a:lnSpc>
-                <a:spcPct val="125000"/>
-              </a:lnSpc>
-              <a:buNone/>
-            </a:pPr>
-            <a:r>
-              <a:rPr lang="en-US" sz="1400" dirty="0">
-                <a:solidFill>
-                  <a:srgbClr val="232323"/>
-                </a:solidFill>
-                <a:latin typeface="Malgun Gothic" pitchFamily="34" charset="0"/>
-                <a:ea typeface="Malgun Gothic" pitchFamily="34" charset="-122"/>
-                <a:cs typeface="Malgun Gothic" pitchFamily="34" charset="-120"/>
-              </a:rPr>
-              <a:t>통기 도트</a:t>
-            </a:r>
-            <a:endParaRPr lang="en-US" sz="1600" dirty="0"/>
-          </a:p>
         </p:txBody>
       </p:sp>
       <p:sp>
         <p:nvSpPr>
-          <p:cNvPr id="34" name="Shape 32"/>
+          <p:cNvPr id="31" name="Shape 29"/>
           <p:cNvSpPr/>
           <p:nvPr/>
         </p:nvSpPr>
@@ -29030,7 +28893,7 @@
       </p:sp>
       <p:sp>
         <p:nvSpPr>
-          <p:cNvPr id="35" name="Text 33"/>
+          <p:cNvPr id="32" name="Text 30"/>
           <p:cNvSpPr txBox="1"/>
           <p:nvPr/>
         </p:nvSpPr>
@@ -29061,7 +28924,7 @@
                 <a:ea typeface="Malgun Gothic" pitchFamily="34" charset="-122"/>
                 <a:cs typeface="Malgun Gothic" pitchFamily="34" charset="-120"/>
               </a:rPr>
-              <a:t>⚠ 🔒 '4점'·'통기 도트'는 실물 확인 후 — 미확인 시 3가지로 축소</a:t>
+              <a:t>⚠ 쿼드그립 quadgrip</a:t>
             </a:r>
             <a:endParaRPr lang="en-US" sz="900" dirty="0"/>
           </a:p>
